--- a/dist/초2/수학/수와계산/초2_수학_수와계산_03_받아올림이있는두자리수덧셈_학생용.pptx
+++ b/dist/초2/수학/수와계산/초2_수학_수와계산_03_받아올림이있는두자리수덧셈_학생용.pptx
@@ -119,13 +119,13 @@
   <p:extLst>
     <p:ext uri="{521415D9-36F7-43E2-AB2F-B90AF26B5E84}">
       <p14:sectionLst xmlns:p14="http://schemas.microsoft.com/office/powerpoint/2010/main">
-        <p14:section name="도입" id="{01ee1243-cdb1-8dd0-dbce-f9b0acd53216}">
+        <p14:section name="도입" id="{b90cdef1-8ecf-9575-8be4-e14d9d135219}">
           <p14:sldIdLst>
             <p14:sldId id="256"/>
             <p14:sldId id="257"/>
           </p14:sldIdLst>
         </p14:section>
-        <p14:section name="개념" id="{2b81a755-f930-51bd-9eb2-450a3c15abfe}">
+        <p14:section name="개념" id="{a4b009b0-7273-aab2-71bb-78a0818e602e}">
           <p14:sldIdLst>
             <p14:sldId id="258"/>
             <p14:sldId id="259"/>
@@ -133,31 +133,31 @@
             <p14:sldId id="263"/>
           </p14:sldIdLst>
         </p14:section>
-        <p14:section name="연습" id="{c87ab293-e7bc-d49a-8ace-33c6b72efeb0}">
+        <p14:section name="연습" id="{2bdff063-8acf-a189-f489-b4d9cddc6407}">
           <p14:sldIdLst>
             <p14:sldId id="261"/>
             <p14:sldId id="262"/>
             <p14:sldId id="264"/>
           </p14:sldIdLst>
         </p14:section>
-        <p14:section name="개념" id="{c6fb56cb-91bc-4aa7-e3a7-452472bdd9bc}">
+        <p14:section name="개념" id="{27892c07-adbf-d726-775b-e48fafa232a3}">
           <p14:sldIdLst/>
         </p14:section>
-        <p14:section name="연습" id="{9effda7a-70c2-d262-2173-031e87cf3b95}">
+        <p14:section name="연습" id="{ef3eb7f3-cc26-a03e-fafc-721dc2bdaaf5}">
           <p14:sldIdLst/>
         </p14:section>
-        <p14:section name="확인" id="{65c004aa-de24-5ab8-32d5-bb7f8cc12f63}">
+        <p14:section name="확인" id="{0ba32060-edae-2b1b-9eb4-2b8a939c0e45}">
           <p14:sldIdLst>
             <p14:sldId id="265"/>
             <p14:sldId id="266"/>
           </p14:sldIdLst>
         </p14:section>
-        <p14:section name="정리" id="{c25207f0-c23b-a81c-891c-c5f56ef6ea3c}">
+        <p14:section name="정리" id="{29e2928f-8a57-a7a1-db08-0314f65b5c5f}">
           <p14:sldIdLst>
             <p14:sldId id="267"/>
           </p14:sldIdLst>
         </p14:section>
-        <p14:section name="보충" id="{3f85ddb6-8813-aae5-424f-77c889ff55ea}">
+        <p14:section name="보충" id="{eb4e2509-e393-cbc5-7cfb-328837273e4c}">
           <p14:sldIdLst>
             <p14:sldId id="268"/>
           </p14:sldIdLst>
@@ -2775,7 +2775,7 @@
           </p:nvPr>
         </p:nvGraphicFramePr>
         <p:xfrm>
-          <a:off x="8001000" y="883920"/>
+          <a:off x="8001000" y="922020"/>
           <a:ext cx="3291840" cy="914400"/>
         </p:xfrm>
         <a:graphic>
@@ -2787,7 +2787,7 @@
                 <a:gridCol w="1097280"/>
                 <a:gridCol w="1097280"/>
               </a:tblGrid>
-              <a:tr h="609600">
+              <a:tr h="590550">
                 <a:tc>
                   <a:txBody>
                     <a:bodyPr/>
@@ -2982,7 +2982,7 @@
                   </a:tcPr>
                 </a:tc>
               </a:tr>
-              <a:tr h="609600">
+              <a:tr h="590550">
                 <a:tc>
                   <a:txBody>
                     <a:bodyPr/>
@@ -3177,7 +3177,7 @@
                   </a:tcPr>
                 </a:tc>
               </a:tr>
-              <a:tr h="609600">
+              <a:tr h="590550">
                 <a:tc>
                   <a:txBody>
                     <a:bodyPr/>
@@ -3383,7 +3383,7 @@
                   </a:tcPr>
                 </a:tc>
               </a:tr>
-              <a:tr h="609600">
+              <a:tr h="590550">
                 <a:tc>
                   <a:txBody>
                     <a:bodyPr/>
@@ -18427,7 +18427,7 @@
           </p:nvPr>
         </p:nvGraphicFramePr>
         <p:xfrm>
-          <a:off x="7956469" y="2042160"/>
+          <a:off x="7956469" y="2089785"/>
           <a:ext cx="3291840" cy="914400"/>
         </p:xfrm>
         <a:graphic>
@@ -18439,7 +18439,7 @@
                 <a:gridCol w="1097280"/>
                 <a:gridCol w="1097280"/>
               </a:tblGrid>
-              <a:tr h="609600">
+              <a:tr h="590550">
                 <a:tc>
                   <a:txBody>
                     <a:bodyPr/>
@@ -18634,7 +18634,7 @@
                   </a:tcPr>
                 </a:tc>
               </a:tr>
-              <a:tr h="609600">
+              <a:tr h="590550">
                 <a:tc>
                   <a:txBody>
                     <a:bodyPr/>
@@ -18818,7 +18818,7 @@
                   </a:tcPr>
                 </a:tc>
               </a:tr>
-              <a:tr h="609600">
+              <a:tr h="590550">
                 <a:tc>
                   <a:txBody>
                     <a:bodyPr/>
@@ -19013,7 +19013,7 @@
                   </a:tcPr>
                 </a:tc>
               </a:tr>
-              <a:tr h="609600">
+              <a:tr h="590550">
                 <a:tc>
                   <a:txBody>
                     <a:bodyPr/>
@@ -19219,7 +19219,7 @@
                   </a:tcPr>
                 </a:tc>
               </a:tr>
-              <a:tr h="609600">
+              <a:tr h="590550">
                 <a:tc>
                   <a:txBody>
                     <a:bodyPr/>
@@ -19907,7 +19907,7 @@
           </p:nvPr>
         </p:nvGraphicFramePr>
         <p:xfrm>
-          <a:off x="7312914" y="2087499"/>
+          <a:off x="7312914" y="2027174"/>
           <a:ext cx="3291840" cy="914400"/>
         </p:xfrm>
         <a:graphic>
@@ -19919,7 +19919,7 @@
                 <a:gridCol w="1097280"/>
                 <a:gridCol w="1097280"/>
               </a:tblGrid>
-              <a:tr h="487680">
+              <a:tr h="511810">
                 <a:tc>
                   <a:txBody>
                     <a:bodyPr/>
@@ -19928,7 +19928,7 @@
                       <a:pPr eaLnBrk="0" algn="ctr" indent="0" marL="0">
                         <a:buNone/>
                       </a:pPr>
-                      <a:endParaRPr lang="en-US" sz="2400" dirty="0">
+                      <a:endParaRPr lang="en-US" sz="2600" dirty="0">
                         <a:latin typeface="맑은 고딕" charset="0"/>
                         <a:ea typeface="맑은 고딕" charset="0"/>
                         <a:cs typeface="맑은 고딕" charset="0"/>
@@ -19986,7 +19986,7 @@
                         <a:buNone/>
                       </a:pPr>
                       <a:r>
-                        <a:rPr lang="en-US" sz="2400" b="1" dirty="0">
+                        <a:rPr lang="en-US" sz="2600" b="1" dirty="0">
                           <a:solidFill>
                             <a:srgbClr val="1F2937"/>
                           </a:solidFill>
@@ -19996,7 +19996,7 @@
                         </a:rPr>
                         <a:t>십</a:t>
                       </a:r>
-                      <a:endParaRPr lang="en-US" sz="2400" dirty="0">
+                      <a:endParaRPr lang="en-US" sz="2600" dirty="0">
                         <a:latin typeface="맑은 고딕" charset="0"/>
                         <a:ea typeface="맑은 고딕" charset="0"/>
                         <a:cs typeface="맑은 고딕" charset="0"/>
@@ -20054,7 +20054,7 @@
                         <a:buNone/>
                       </a:pPr>
                       <a:r>
-                        <a:rPr lang="en-US" sz="2400" b="1" dirty="0">
+                        <a:rPr lang="en-US" sz="2600" b="1" dirty="0">
                           <a:solidFill>
                             <a:srgbClr val="1F2937"/>
                           </a:solidFill>
@@ -20064,7 +20064,7 @@
                         </a:rPr>
                         <a:t>일</a:t>
                       </a:r>
-                      <a:endParaRPr lang="en-US" sz="2400" dirty="0">
+                      <a:endParaRPr lang="en-US" sz="2600" dirty="0">
                         <a:latin typeface="맑은 고딕" charset="0"/>
                         <a:ea typeface="맑은 고딕" charset="0"/>
                         <a:cs typeface="맑은 고딕" charset="0"/>
@@ -20114,7 +20114,7 @@
                   </a:tcPr>
                 </a:tc>
               </a:tr>
-              <a:tr h="487680">
+              <a:tr h="511810">
                 <a:tc>
                   <a:txBody>
                     <a:bodyPr/>
@@ -20123,7 +20123,7 @@
                       <a:pPr eaLnBrk="0" algn="ctr" indent="0" marL="0">
                         <a:buNone/>
                       </a:pPr>
-                      <a:endParaRPr lang="en-US" sz="2400" dirty="0">
+                      <a:endParaRPr lang="en-US" sz="2600" dirty="0">
                         <a:latin typeface="맑은 고딕" charset="0"/>
                         <a:ea typeface="맑은 고딕" charset="0"/>
                         <a:cs typeface="맑은 고딕" charset="0"/>
@@ -20181,7 +20181,7 @@
                         <a:buNone/>
                       </a:pPr>
                       <a:r>
-                        <a:rPr lang="en-US" sz="2400" dirty="0">
+                        <a:rPr lang="en-US" sz="2600" dirty="0">
                           <a:solidFill>
                             <a:srgbClr val="1F2937"/>
                           </a:solidFill>
@@ -20191,7 +20191,7 @@
                         </a:rPr>
                         <a:t>□</a:t>
                       </a:r>
-                      <a:endParaRPr lang="en-US" sz="2400" dirty="0">
+                      <a:endParaRPr lang="en-US" sz="2600" dirty="0">
                         <a:latin typeface="맑은 고딕" charset="0"/>
                         <a:ea typeface="맑은 고딕" charset="0"/>
                         <a:cs typeface="맑은 고딕" charset="0"/>
@@ -20248,7 +20248,7 @@
                       <a:pPr eaLnBrk="0" algn="ctr" indent="0" marL="0">
                         <a:buNone/>
                       </a:pPr>
-                      <a:endParaRPr lang="en-US" sz="2400" dirty="0">
+                      <a:endParaRPr lang="en-US" sz="2600" dirty="0">
                         <a:latin typeface="맑은 고딕" charset="0"/>
                         <a:ea typeface="맑은 고딕" charset="0"/>
                         <a:cs typeface="맑은 고딕" charset="0"/>
@@ -20298,7 +20298,7 @@
                   </a:tcPr>
                 </a:tc>
               </a:tr>
-              <a:tr h="487680">
+              <a:tr h="511810">
                 <a:tc>
                   <a:txBody>
                     <a:bodyPr/>
@@ -20307,7 +20307,7 @@
                       <a:pPr eaLnBrk="0" algn="ctr" indent="0" marL="0">
                         <a:buNone/>
                       </a:pPr>
-                      <a:endParaRPr lang="en-US" sz="2400" dirty="0">
+                      <a:endParaRPr lang="en-US" sz="2600" dirty="0">
                         <a:latin typeface="맑은 고딕" charset="0"/>
                         <a:ea typeface="맑은 고딕" charset="0"/>
                         <a:cs typeface="맑은 고딕" charset="0"/>
@@ -20365,7 +20365,7 @@
                         <a:buNone/>
                       </a:pPr>
                       <a:r>
-                        <a:rPr lang="en-US" sz="2400" dirty="0">
+                        <a:rPr lang="en-US" sz="2600" dirty="0">
                           <a:solidFill>
                             <a:srgbClr val="1F2937"/>
                           </a:solidFill>
@@ -20375,7 +20375,7 @@
                         </a:rPr>
                         <a:t>4</a:t>
                       </a:r>
-                      <a:endParaRPr lang="en-US" sz="2400" dirty="0">
+                      <a:endParaRPr lang="en-US" sz="2600" dirty="0">
                         <a:latin typeface="맑은 고딕" charset="0"/>
                         <a:ea typeface="맑은 고딕" charset="0"/>
                         <a:cs typeface="맑은 고딕" charset="0"/>
@@ -20433,7 +20433,7 @@
                         <a:buNone/>
                       </a:pPr>
                       <a:r>
-                        <a:rPr lang="en-US" sz="2400" dirty="0">
+                        <a:rPr lang="en-US" sz="2600" dirty="0">
                           <a:solidFill>
                             <a:srgbClr val="1F2937"/>
                           </a:solidFill>
@@ -20443,7 +20443,7 @@
                         </a:rPr>
                         <a:t>6</a:t>
                       </a:r>
-                      <a:endParaRPr lang="en-US" sz="2400" dirty="0">
+                      <a:endParaRPr lang="en-US" sz="2600" dirty="0">
                         <a:latin typeface="맑은 고딕" charset="0"/>
                         <a:ea typeface="맑은 고딕" charset="0"/>
                         <a:cs typeface="맑은 고딕" charset="0"/>
@@ -20493,7 +20493,7 @@
                   </a:tcPr>
                 </a:tc>
               </a:tr>
-              <a:tr h="487680">
+              <a:tr h="511810">
                 <a:tc>
                   <a:txBody>
                     <a:bodyPr/>
@@ -20503,7 +20503,7 @@
                         <a:buNone/>
                       </a:pPr>
                       <a:r>
-                        <a:rPr lang="en-US" sz="2400" dirty="0">
+                        <a:rPr lang="en-US" sz="2600" dirty="0">
                           <a:solidFill>
                             <a:srgbClr val="1F2937"/>
                           </a:solidFill>
@@ -20513,7 +20513,7 @@
                         </a:rPr>
                         <a:t>+</a:t>
                       </a:r>
-                      <a:endParaRPr lang="en-US" sz="2400" dirty="0">
+                      <a:endParaRPr lang="en-US" sz="2600" dirty="0">
                         <a:latin typeface="맑은 고딕" charset="0"/>
                         <a:ea typeface="맑은 고딕" charset="0"/>
                         <a:cs typeface="맑은 고딕" charset="0"/>
@@ -20571,7 +20571,7 @@
                         <a:buNone/>
                       </a:pPr>
                       <a:r>
-                        <a:rPr lang="en-US" sz="2400" dirty="0">
+                        <a:rPr lang="en-US" sz="2600" dirty="0">
                           <a:solidFill>
                             <a:srgbClr val="1F2937"/>
                           </a:solidFill>
@@ -20581,7 +20581,7 @@
                         </a:rPr>
                         <a:t>2</a:t>
                       </a:r>
-                      <a:endParaRPr lang="en-US" sz="2400" dirty="0">
+                      <a:endParaRPr lang="en-US" sz="2600" dirty="0">
                         <a:latin typeface="맑은 고딕" charset="0"/>
                         <a:ea typeface="맑은 고딕" charset="0"/>
                         <a:cs typeface="맑은 고딕" charset="0"/>
@@ -20639,7 +20639,7 @@
                         <a:buNone/>
                       </a:pPr>
                       <a:r>
-                        <a:rPr lang="en-US" sz="2400" dirty="0">
+                        <a:rPr lang="en-US" sz="2600" dirty="0">
                           <a:solidFill>
                             <a:srgbClr val="1F2937"/>
                           </a:solidFill>
@@ -20649,7 +20649,7 @@
                         </a:rPr>
                         <a:t>9</a:t>
                       </a:r>
-                      <a:endParaRPr lang="en-US" sz="2400" dirty="0">
+                      <a:endParaRPr lang="en-US" sz="2600" dirty="0">
                         <a:latin typeface="맑은 고딕" charset="0"/>
                         <a:ea typeface="맑은 고딕" charset="0"/>
                         <a:cs typeface="맑은 고딕" charset="0"/>
@@ -20699,7 +20699,7 @@
                   </a:tcPr>
                 </a:tc>
               </a:tr>
-              <a:tr h="487680">
+              <a:tr h="511810">
                 <a:tc>
                   <a:txBody>
                     <a:bodyPr/>
@@ -20708,7 +20708,7 @@
                       <a:pPr eaLnBrk="0" algn="ctr" indent="0" marL="0">
                         <a:buNone/>
                       </a:pPr>
-                      <a:endParaRPr lang="en-US" sz="2400" dirty="0">
+                      <a:endParaRPr lang="en-US" sz="2600" dirty="0">
                         <a:latin typeface="맑은 고딕" charset="0"/>
                         <a:ea typeface="맑은 고딕" charset="0"/>
                         <a:cs typeface="맑은 고딕" charset="0"/>
@@ -20766,7 +20766,7 @@
                         <a:buNone/>
                       </a:pPr>
                       <a:r>
-                        <a:rPr lang="en-US" sz="2400" dirty="0">
+                        <a:rPr lang="en-US" sz="2600" dirty="0">
                           <a:solidFill>
                             <a:srgbClr val="1F2937"/>
                           </a:solidFill>
@@ -20776,7 +20776,7 @@
                         </a:rPr>
                         <a:t>□</a:t>
                       </a:r>
-                      <a:endParaRPr lang="en-US" sz="2400" dirty="0">
+                      <a:endParaRPr lang="en-US" sz="2600" dirty="0">
                         <a:latin typeface="맑은 고딕" charset="0"/>
                         <a:ea typeface="맑은 고딕" charset="0"/>
                         <a:cs typeface="맑은 고딕" charset="0"/>
@@ -20834,7 +20834,7 @@
                         <a:buNone/>
                       </a:pPr>
                       <a:r>
-                        <a:rPr lang="en-US" sz="2400" dirty="0">
+                        <a:rPr lang="en-US" sz="2600" dirty="0">
                           <a:solidFill>
                             <a:srgbClr val="1F2937"/>
                           </a:solidFill>
@@ -20844,7 +20844,7 @@
                         </a:rPr>
                         <a:t>□</a:t>
                       </a:r>
-                      <a:endParaRPr lang="en-US" sz="2400" dirty="0">
+                      <a:endParaRPr lang="en-US" sz="2600" dirty="0">
                         <a:latin typeface="맑은 고딕" charset="0"/>
                         <a:ea typeface="맑은 고딕" charset="0"/>
                         <a:cs typeface="맑은 고딕" charset="0"/>
@@ -21890,7 +21890,7 @@
           </p:nvPr>
         </p:nvGraphicFramePr>
         <p:xfrm>
-          <a:off x="7483450" y="2042160"/>
+          <a:off x="7483450" y="2089785"/>
           <a:ext cx="4023360" cy="914400"/>
         </p:xfrm>
         <a:graphic>
@@ -21903,7 +21903,7 @@
                 <a:gridCol w="1005840"/>
                 <a:gridCol w="1005840"/>
               </a:tblGrid>
-              <a:tr h="609600">
+              <a:tr h="590550">
                 <a:tc>
                   <a:txBody>
                     <a:bodyPr/>
@@ -22166,7 +22166,7 @@
                   </a:tcPr>
                 </a:tc>
               </a:tr>
-              <a:tr h="609600">
+              <a:tr h="590550">
                 <a:tc>
                   <a:txBody>
                     <a:bodyPr/>
@@ -22407,7 +22407,7 @@
                   </a:tcPr>
                 </a:tc>
               </a:tr>
-              <a:tr h="609600">
+              <a:tr h="590550">
                 <a:tc>
                   <a:txBody>
                     <a:bodyPr/>
@@ -22659,7 +22659,7 @@
                   </a:tcPr>
                 </a:tc>
               </a:tr>
-              <a:tr h="609600">
+              <a:tr h="590550">
                 <a:tc>
                   <a:txBody>
                     <a:bodyPr/>
@@ -22922,7 +22922,7 @@
                   </a:tcPr>
                 </a:tc>
               </a:tr>
-              <a:tr h="609600">
+              <a:tr h="590550">
                 <a:tc>
                   <a:txBody>
                     <a:bodyPr/>
